--- a/Final_Revision/Exam_Practice/FR-L03_Writing_Workshop_Places_Environment_and_the_Digital_World.pptx
+++ b/Final_Revision/Exam_Practice/FR-L03_Writing_Workshop_Places_Environment_and_the_Digital_World.pptx
@@ -784,7 +784,11 @@
           <a:lstStyle/>
           <a:p>
             <a:r>
-              <a:rPr lang="en-US" dirty="0"/>
+              <a:rPr lang="ar-SA" dirty="0">
+                <a:latin typeface="Amiri" pitchFamily="2" charset="-78"/>
+                <a:ea typeface="Amiri" pitchFamily="2" charset="-78"/>
+                <a:cs typeface="Amiri" pitchFamily="2" charset="-78"/>
+              </a:rPr>
               <a:t>Q3 (3 min to choose and read). Title (أ) suits Core and Develop; title (ب) suits Stretch.</a:t>
             </a:r>
             <a:endParaRPr lang="en-US" dirty="0"/>
@@ -1403,7 +1407,11 @@
           <a:lstStyle/>
           <a:p>
             <a:r>
-              <a:rPr lang="en-US" dirty="0"/>
+              <a:rPr lang="ar-SA" dirty="0">
+                <a:latin typeface="Amiri" pitchFamily="2" charset="-78"/>
+                <a:ea typeface="Amiri" pitchFamily="2" charset="-78"/>
+                <a:cs typeface="Amiri" pitchFamily="2" charset="-78"/>
+              </a:rPr>
               <a:t>WELCOME (1 min) — while students join.
 • Greet each student by name as they arrive: السَّلَامُ عَلَيْكُمْ. Take the register (Pastoral Tracker: attendance 0/1).
 • 2-MINUTE CHECK-IN (SEND training): a private chat to any student who seemed unsettled last lesson — “Are you okay today? 👍 / 👎”.
@@ -1936,7 +1944,11 @@
           <a:lstStyle/>
           <a:p>
             <a:r>
-              <a:rPr lang="en-US" dirty="0"/>
+              <a:rPr lang="ar-SA" dirty="0">
+                <a:latin typeface="Amiri" pitchFamily="2" charset="-78"/>
+                <a:ea typeface="Amiri" pitchFamily="2" charset="-78"/>
+                <a:cs typeface="Amiri" pitchFamily="2" charset="-78"/>
+              </a:rPr>
               <a:t>Question words: أَيْنَ يَقَعُ (where is it → فِي شَمَالِ …) · صِفْ (describe!) · رَأَيْتَهَا (you saw it — PAST) · مَاذَا فَعَلْتُمْ (what did you do) · خِطَطُكَ (FUTURE).</a:t>
             </a:r>
             <a:endParaRPr lang="en-US" dirty="0"/>
@@ -2508,6 +2520,7 @@
                   <a:srgbClr val="D4AF37"/>
                 </a:solidFill>
                 <a:latin typeface="Amiri" pitchFamily="2" charset="-78"/>
+                <a:ea typeface="Amiri" pitchFamily="2" charset="-78"/>
                 <a:cs typeface="Amiri" pitchFamily="2" charset="-78"/>
               </a:rPr>
               <a:t>م</a:t>
@@ -2714,6 +2727,7 @@
                   <a:srgbClr val="D4AF37"/>
                 </a:solidFill>
                 <a:latin typeface="Amiri" pitchFamily="2" charset="-78"/>
+                <a:ea typeface="Amiri" pitchFamily="2" charset="-78"/>
                 <a:cs typeface="Amiri" pitchFamily="2" charset="-78"/>
               </a:rPr>
               <a:t>وَرْشَةُ الكِتَابَةِ — الأَمَاكِنُ وَالبِيئَةُ وَالعَالَمُ الرَّقْمِيُّ</a:t>
@@ -3171,6 +3185,7 @@
                   <a:srgbClr val="D4AF37"/>
                 </a:solidFill>
                 <a:latin typeface="Amiri" pitchFamily="2" charset="-78"/>
+                <a:ea typeface="Amiri" pitchFamily="2" charset="-78"/>
                 <a:cs typeface="Amiri" pitchFamily="2" charset="-78"/>
               </a:rPr>
               <a:t>م</a:t>
@@ -3491,6 +3506,7 @@
                   <a:srgbClr val="8A6D1E"/>
                 </a:solidFill>
                 <a:latin typeface="Amiri" pitchFamily="2" charset="-78"/>
+                <a:ea typeface="Amiri" pitchFamily="2" charset="-78"/>
                 <a:cs typeface="Amiri" pitchFamily="2" charset="-78"/>
               </a:rPr>
               <a:t>نَمُوذَجُ الإِجَابَةِ</a:t>
@@ -3604,6 +3620,7 @@
                   <a:srgbClr val="1F2A37"/>
                 </a:solidFill>
                 <a:latin typeface="Amiri" pitchFamily="2" charset="-78"/>
+                <a:ea typeface="Amiri" pitchFamily="2" charset="-78"/>
                 <a:cs typeface="Amiri" pitchFamily="2" charset="-78"/>
               </a:rPr>
               <a:t>مَرْحَبًا يَا طَارِقُ،</a:t>
@@ -3623,6 +3640,7 @@
                   <a:srgbClr val="1F2A37"/>
                 </a:solidFill>
                 <a:latin typeface="Amiri" pitchFamily="2" charset="-78"/>
+                <a:ea typeface="Amiri" pitchFamily="2" charset="-78"/>
                 <a:cs typeface="Amiri" pitchFamily="2" charset="-78"/>
               </a:rPr>
               <a:t>كَيْفَ حَالُكَ؟ قَضَيْتُ عُطْلَةَ نِهَايَةِ الأُسْبُوعِ مَعَ المَدْرَسَةِ فِي مِنْطَقَةِ البُحَيْرَاتِ. تَقَعُ المِنْطَقَةُ فِي شَمَالِ غَرْبِ إِنْجِلْتِرَا، وَفِيهَا جِبَالٌ عَالِيَةٌ وَبُحَيْرَاتٌ صَافِيَةٌ. كَانَ الجَوُّ بَارِدًا وَمُمْطِرًا، لٰكِنَّنَا مَشَيْنَا عَشَرَةَ كِيلُومِتْرَاتٍ يَوْمَ السَّبْتِ! لِلْأَسَفِ رَأَيْنَا قِمَامَةً كَثِيرَةً قُرْبَ البُحَيْرَةِ، بِسَبَبِ السُّيَّاحِ. لِذٰلِكَ جَمَعْنَا البْلَاسْتِيكَ فِي أَكْيَاسٍ كَبِيرَةٍ. أَظُنُّ أَنَّ الرِّحْلَةَ كَانَتْ مُمْتِعَةً وَمُفِيدَةً. فِي الصَّيْفِ سَأَعُودُ إِلَى هُنَاكَ مَعَ عَائِلَتِي. وَأَنْتَ، هَلْ زُرْتَ مَكَانًا طَبِيعِيًّا جَمِيلًا؟</a:t>
@@ -3642,6 +3660,7 @@
                   <a:srgbClr val="1F2A37"/>
                 </a:solidFill>
                 <a:latin typeface="Amiri" pitchFamily="2" charset="-78"/>
+                <a:ea typeface="Amiri" pitchFamily="2" charset="-78"/>
                 <a:cs typeface="Amiri" pitchFamily="2" charset="-78"/>
               </a:rPr>
               <a:t>إِلَى اللِّقَاءِ،</a:t>
@@ -3661,6 +3680,7 @@
                   <a:srgbClr val="1F2A37"/>
                 </a:solidFill>
                 <a:latin typeface="Amiri" pitchFamily="2" charset="-78"/>
+                <a:ea typeface="Amiri" pitchFamily="2" charset="-78"/>
                 <a:cs typeface="Amiri" pitchFamily="2" charset="-78"/>
               </a:rPr>
               <a:t>عَادِلٌ</a:t>
@@ -3824,11 +3844,12 @@
               <a:buNone/>
             </a:pPr>
             <a:r>
-              <a:rPr lang="en-US" sz="950" b="1" dirty="0">
+              <a:rPr lang="ar-SA" sz="950" b="1" dirty="0">
                 <a:solidFill>
                   <a:srgbClr val="FFFFFF"/>
                 </a:solidFill>
                 <a:latin typeface="Calibri" pitchFamily="34" charset="0"/>
+                <a:ea typeface="Amiri" pitchFamily="2" charset="-78"/>
                 <a:cs typeface="Amiri" pitchFamily="2" charset="-78"/>
               </a:rPr>
               <a:t>تَقَعُ المِنْطَقَةُ فِي شَمَالِ</a:t>
@@ -3889,11 +3910,12 @@
               <a:buNone/>
             </a:pPr>
             <a:r>
-              <a:rPr lang="en-US" sz="950" b="1" dirty="0">
+              <a:rPr lang="ar-SA" sz="950" b="1" dirty="0">
                 <a:solidFill>
                   <a:srgbClr val="FFFFFF"/>
                 </a:solidFill>
                 <a:latin typeface="Calibri" pitchFamily="34" charset="0"/>
+                <a:ea typeface="Amiri" pitchFamily="2" charset="-78"/>
                 <a:cs typeface="Amiri" pitchFamily="2" charset="-78"/>
               </a:rPr>
               <a:t>جِبَالٌ عَالِيَةٌ</a:t>
@@ -3954,11 +3976,12 @@
               <a:buNone/>
             </a:pPr>
             <a:r>
-              <a:rPr lang="en-US" sz="950" b="1" dirty="0">
+              <a:rPr lang="ar-SA" sz="950" b="1" dirty="0">
                 <a:solidFill>
                   <a:srgbClr val="FFFFFF"/>
                 </a:solidFill>
                 <a:latin typeface="Calibri" pitchFamily="34" charset="0"/>
+                <a:ea typeface="Amiri" pitchFamily="2" charset="-78"/>
                 <a:cs typeface="Amiri" pitchFamily="2" charset="-78"/>
               </a:rPr>
               <a:t>بِسَبَبِ السُّيَّاحِ</a:t>
@@ -4019,11 +4042,12 @@
               <a:buNone/>
             </a:pPr>
             <a:r>
-              <a:rPr lang="en-US" sz="950" b="1" dirty="0">
+              <a:rPr lang="ar-SA" sz="950" b="1" dirty="0">
                 <a:solidFill>
                   <a:srgbClr val="FFFFFF"/>
                 </a:solidFill>
                 <a:latin typeface="Calibri" pitchFamily="34" charset="0"/>
+                <a:ea typeface="Amiri" pitchFamily="2" charset="-78"/>
                 <a:cs typeface="Amiri" pitchFamily="2" charset="-78"/>
               </a:rPr>
               <a:t>لِذٰلِكَ جَمَعْنَا</a:t>
@@ -4157,6 +4181,7 @@
                   <a:srgbClr val="D4AF37"/>
                 </a:solidFill>
                 <a:latin typeface="Amiri" pitchFamily="2" charset="-78"/>
+                <a:ea typeface="Amiri" pitchFamily="2" charset="-78"/>
                 <a:cs typeface="Amiri" pitchFamily="2" charset="-78"/>
               </a:rPr>
               <a:t>م</a:t>
@@ -4477,6 +4502,7 @@
                   <a:srgbClr val="8A6D1E"/>
                 </a:solidFill>
                 <a:latin typeface="Amiri" pitchFamily="2" charset="-78"/>
+                <a:ea typeface="Amiri" pitchFamily="2" charset="-78"/>
                 <a:cs typeface="Amiri" pitchFamily="2" charset="-78"/>
               </a:rPr>
               <a:t>نَمُوذَجُ الإِجَابَةِ</a:t>
@@ -4590,6 +4616,7 @@
                   <a:srgbClr val="1F2A37"/>
                 </a:solidFill>
                 <a:latin typeface="Amiri" pitchFamily="2" charset="-78"/>
+                <a:ea typeface="Amiri" pitchFamily="2" charset="-78"/>
                 <a:cs typeface="Amiri" pitchFamily="2" charset="-78"/>
               </a:rPr>
               <a:t>عَزِيزِي طَارِقُ،</a:t>
@@ -4609,6 +4636,7 @@
                   <a:srgbClr val="1F2A37"/>
                 </a:solidFill>
                 <a:latin typeface="Amiri" pitchFamily="2" charset="-78"/>
+                <a:ea typeface="Amiri" pitchFamily="2" charset="-78"/>
                 <a:cs typeface="Amiri" pitchFamily="2" charset="-78"/>
               </a:rPr>
               <a:t>عُدْتُ أَمْسِ مِنْ رِحْلَةٍ مَدْرَسِيَّةٍ إِلَى مِنْطَقَةِ البُحَيْرَاتِ، الَّتِي تَقَعُ فِي شَمَالِ غَرْبِ إِنْجِلْتِرَا، وَيَقْصِدُهَا مَلَايِينُ السُّيَّاحِ كُلَّ عَامٍ. صَحِيحٌ أَنَّ المَطَرَ لَمْ يَتَوَقَّفْ يَوْمَيْنِ كَامِلَيْنِ، غَيْرَ أَنَّ الجِبَالَ الخَضْرَاءَ وَالبُحَيْرَاتِ الصَّافِيَةَ كَانَتْ أَجْمَلَ مِنْ أَيِّ صُورَةٍ. وَمَا أَحْزَنَنِي أَنَّنَا وَجَدْنَا قِمَامَةً كَثِيرَةً تُرِكَتْ عَلَى الشَّاطِئِ، مِمَّا يُهَدِّدُ الطُّيُورَ وَالأَسْمَاكَ. لِذٰلِكَ قَضَيْنَا صَبَاحَ الأَحَدِ فِي تَنْظِيفِ المَكَانِ، فَجُمِعَ أَكْثَرُ مِنْ عِشْرِينَ كِيسًا مِنَ البْلَاسْتِيكِ! وَإِذَا وَافَقَ المُدِيرُ، فَسَنُنَظِّمُ حَمْلَةً مِثْلَهَا فِي حَدِيقَةِ مَدِينَتِنَا. هَلْ تُشَارِكُ مَعَنَا؟</a:t>
@@ -4628,6 +4656,7 @@
                   <a:srgbClr val="1F2A37"/>
                 </a:solidFill>
                 <a:latin typeface="Amiri" pitchFamily="2" charset="-78"/>
+                <a:ea typeface="Amiri" pitchFamily="2" charset="-78"/>
                 <a:cs typeface="Amiri" pitchFamily="2" charset="-78"/>
               </a:rPr>
               <a:t>مَعَ تَحِيَّاتِي،</a:t>
@@ -4647,6 +4676,7 @@
                   <a:srgbClr val="1F2A37"/>
                 </a:solidFill>
                 <a:latin typeface="Amiri" pitchFamily="2" charset="-78"/>
+                <a:ea typeface="Amiri" pitchFamily="2" charset="-78"/>
                 <a:cs typeface="Amiri" pitchFamily="2" charset="-78"/>
               </a:rPr>
               <a:t>عَادِلٌ</a:t>
@@ -4810,11 +4840,12 @@
               <a:buNone/>
             </a:pPr>
             <a:r>
-              <a:rPr lang="en-US" sz="950" b="1" dirty="0">
+              <a:rPr lang="ar-SA" sz="950" b="1" dirty="0">
                 <a:solidFill>
                   <a:srgbClr val="FFFFFF"/>
                 </a:solidFill>
                 <a:latin typeface="Calibri" pitchFamily="34" charset="0"/>
+                <a:ea typeface="Amiri" pitchFamily="2" charset="-78"/>
                 <a:cs typeface="Amiri" pitchFamily="2" charset="-78"/>
               </a:rPr>
               <a:t>الَّتِي تَقَعُ … وَيَقْصِدُهَا</a:t>
@@ -4875,11 +4906,12 @@
               <a:buNone/>
             </a:pPr>
             <a:r>
-              <a:rPr lang="en-US" sz="950" b="1" dirty="0">
+              <a:rPr lang="ar-SA" sz="950" b="1" dirty="0">
                 <a:solidFill>
                   <a:srgbClr val="FFFFFF"/>
                 </a:solidFill>
                 <a:latin typeface="Calibri" pitchFamily="34" charset="0"/>
+                <a:ea typeface="Amiri" pitchFamily="2" charset="-78"/>
                 <a:cs typeface="Amiri" pitchFamily="2" charset="-78"/>
               </a:rPr>
               <a:t>صَحِيحٌ أَنَّ … غَيْرَ أَنَّ</a:t>
@@ -4940,11 +4972,12 @@
               <a:buNone/>
             </a:pPr>
             <a:r>
-              <a:rPr lang="en-US" sz="950" b="1" dirty="0">
+              <a:rPr lang="ar-SA" sz="950" b="1" dirty="0">
                 <a:solidFill>
                   <a:srgbClr val="FFFFFF"/>
                 </a:solidFill>
                 <a:latin typeface="Calibri" pitchFamily="34" charset="0"/>
+                <a:ea typeface="Amiri" pitchFamily="2" charset="-78"/>
                 <a:cs typeface="Amiri" pitchFamily="2" charset="-78"/>
               </a:rPr>
               <a:t>تُرِكَتْ … مِمَّا يُهَدِّدُ</a:t>
@@ -5005,11 +5038,12 @@
               <a:buNone/>
             </a:pPr>
             <a:r>
-              <a:rPr lang="en-US" sz="950" b="1" dirty="0">
+              <a:rPr lang="ar-SA" sz="950" b="1" dirty="0">
                 <a:solidFill>
                   <a:srgbClr val="FFFFFF"/>
                 </a:solidFill>
                 <a:latin typeface="Calibri" pitchFamily="34" charset="0"/>
+                <a:ea typeface="Amiri" pitchFamily="2" charset="-78"/>
                 <a:cs typeface="Amiri" pitchFamily="2" charset="-78"/>
               </a:rPr>
               <a:t>فَجُمِعَ أَكْثَرُ مِنْ</a:t>
@@ -5143,6 +5177,7 @@
                   <a:srgbClr val="D4AF37"/>
                 </a:solidFill>
                 <a:latin typeface="Amiri" pitchFamily="2" charset="-78"/>
+                <a:ea typeface="Amiri" pitchFamily="2" charset="-78"/>
                 <a:cs typeface="Amiri" pitchFamily="2" charset="-78"/>
               </a:rPr>
               <a:t>م</a:t>
@@ -5463,6 +5498,7 @@
                   <a:srgbClr val="8A6D1E"/>
                 </a:solidFill>
                 <a:latin typeface="Amiri" pitchFamily="2" charset="-78"/>
+                <a:ea typeface="Amiri" pitchFamily="2" charset="-78"/>
                 <a:cs typeface="Amiri" pitchFamily="2" charset="-78"/>
               </a:rPr>
               <a:t>اخْتَرْ عُنْوَانًا وَاحِدًا</a:t>
@@ -5743,6 +5779,7 @@
                   <a:srgbClr val="1B3B6F"/>
                 </a:solidFill>
                 <a:latin typeface="Amiri" pitchFamily="2" charset="-78"/>
+                <a:ea typeface="Amiri" pitchFamily="2" charset="-78"/>
                 <a:cs typeface="Amiri" pitchFamily="2" charset="-78"/>
               </a:rPr>
               <a:t>مَدِينَتِي: المَاضِي وَالحَاضِرُ وَالمُسْتَقْبَلُ</a:t>
@@ -5781,6 +5818,7 @@
                   <a:srgbClr val="1B3B6F"/>
                 </a:solidFill>
                 <a:latin typeface="Amiri" pitchFamily="2" charset="-78"/>
+                <a:ea typeface="Amiri" pitchFamily="2" charset="-78"/>
                 <a:cs typeface="Amiri" pitchFamily="2" charset="-78"/>
               </a:rPr>
               <a:t>(أ)</a:t>
@@ -5887,6 +5925,7 @@
                   <a:srgbClr val="1B3B6F"/>
                 </a:solidFill>
                 <a:latin typeface="Amiri" pitchFamily="2" charset="-78"/>
+                <a:ea typeface="Amiri" pitchFamily="2" charset="-78"/>
                 <a:cs typeface="Amiri" pitchFamily="2" charset="-78"/>
               </a:rPr>
               <a:t>أَيْنَ تَقَعُ مَدِينَتُكَ وَمَا فِيهَا · الطَّقْسُ وَالحَيَاةُ فِيهَا · مُشْكِلَةٌ بِيئِيَّةٌ وَمَا فَعَلْتَهُ · كَيْفَ تَغَيَّرَتْ وَكَيْفَ تُرِيدُهَا فِي المُسْتَقْبَلِ</a:t>
@@ -6018,6 +6057,7 @@
                   <a:srgbClr val="1B3B6F"/>
                 </a:solidFill>
                 <a:latin typeface="Amiri" pitchFamily="2" charset="-78"/>
+                <a:ea typeface="Amiri" pitchFamily="2" charset="-78"/>
                 <a:cs typeface="Amiri" pitchFamily="2" charset="-78"/>
               </a:rPr>
               <a:t>هَلْ تُنْقِذُ التِّكْنُولُوجْيَا البِيئَةَ أَمْ تَضُرُّهَا؟</a:t>
@@ -6056,6 +6096,7 @@
                   <a:srgbClr val="1B3B6F"/>
                 </a:solidFill>
                 <a:latin typeface="Amiri" pitchFamily="2" charset="-78"/>
+                <a:ea typeface="Amiri" pitchFamily="2" charset="-78"/>
                 <a:cs typeface="Amiri" pitchFamily="2" charset="-78"/>
               </a:rPr>
               <a:t>(ب)</a:t>
@@ -6159,6 +6200,7 @@
                   <a:srgbClr val="1B3B6F"/>
                 </a:solidFill>
                 <a:latin typeface="Amiri" pitchFamily="2" charset="-78"/>
+                <a:ea typeface="Amiri" pitchFamily="2" charset="-78"/>
                 <a:cs typeface="Amiri" pitchFamily="2" charset="-78"/>
               </a:rPr>
               <a:t>المَوْضُوعُ · الحُلُولُ وَالمَخَاطِرُ · مِثَالٌ مِنْ حَيَاتِكَ · رَأْيُكَ</a:t>
@@ -6358,6 +6400,7 @@
                   <a:srgbClr val="D4AF37"/>
                 </a:solidFill>
                 <a:latin typeface="Amiri" pitchFamily="2" charset="-78"/>
+                <a:ea typeface="Amiri" pitchFamily="2" charset="-78"/>
                 <a:cs typeface="Amiri" pitchFamily="2" charset="-78"/>
               </a:rPr>
               <a:t>م</a:t>
@@ -6678,6 +6721,7 @@
                   <a:srgbClr val="8A6D1E"/>
                 </a:solidFill>
                 <a:latin typeface="Amiri" pitchFamily="2" charset="-78"/>
+                <a:ea typeface="Amiri" pitchFamily="2" charset="-78"/>
                 <a:cs typeface="Amiri" pitchFamily="2" charset="-78"/>
               </a:rPr>
               <a:t>خُطَّةُ الكِتَابَةِ</a:t>
@@ -7302,6 +7346,7 @@
                   <a:srgbClr val="1B3B6F"/>
                 </a:solidFill>
                 <a:latin typeface="Amiri" pitchFamily="2" charset="-78"/>
+                <a:ea typeface="Amiri" pitchFamily="2" charset="-78"/>
                 <a:cs typeface="Amiri" pitchFamily="2" charset="-78"/>
               </a:rPr>
               <a:t>تُوجَدُ حَدِيقَةٌ كَبِيرَةٌ مُقَابِلَ بَيْتِي.</a:t>
@@ -7401,6 +7446,7 @@
                   <a:srgbClr val="1B3B6F"/>
                 </a:solidFill>
                 <a:latin typeface="Amiri" pitchFamily="2" charset="-78"/>
+                <a:ea typeface="Amiri" pitchFamily="2" charset="-78"/>
                 <a:cs typeface="Amiri" pitchFamily="2" charset="-78"/>
               </a:rPr>
               <a:t>تَلَوُّثُ الهَوَاءِ بِسَبَبِ السَّيَّارَاتِ، مِمَّا …</a:t>
@@ -7500,6 +7546,7 @@
                   <a:srgbClr val="1B3B6F"/>
                 </a:solidFill>
                 <a:latin typeface="Amiri" pitchFamily="2" charset="-78"/>
+                <a:ea typeface="Amiri" pitchFamily="2" charset="-78"/>
                 <a:cs typeface="Amiri" pitchFamily="2" charset="-78"/>
               </a:rPr>
               <a:t>يَجِبُ عَلَى البَلَدِيَّةِ أَنْ تُحَسِّنَ الحَافِلَاتِ.</a:t>
@@ -7661,6 +7708,7 @@
                   <a:srgbClr val="1F2A37"/>
                 </a:solidFill>
                 <a:latin typeface="Amiri" pitchFamily="2" charset="-78"/>
+                <a:ea typeface="Amiri" pitchFamily="2" charset="-78"/>
                 <a:cs typeface="Amiri" pitchFamily="2" charset="-78"/>
               </a:rPr>
               <a:t>أ</a:t>
@@ -7687,6 +7735,7 @@
                   <a:srgbClr val="1F2A37"/>
                 </a:solidFill>
                 <a:latin typeface="Amiri" pitchFamily="2" charset="-78"/>
+                <a:ea typeface="Amiri" pitchFamily="2" charset="-78"/>
                 <a:cs typeface="Amiri" pitchFamily="2" charset="-78"/>
               </a:rPr>
               <a:t>ب</a:t>
@@ -7833,6 +7882,7 @@
                   <a:srgbClr val="D4AF37"/>
                 </a:solidFill>
                 <a:latin typeface="Amiri" pitchFamily="2" charset="-78"/>
+                <a:ea typeface="Amiri" pitchFamily="2" charset="-78"/>
                 <a:cs typeface="Amiri" pitchFamily="2" charset="-78"/>
               </a:rPr>
               <a:t>م</a:t>
@@ -8090,6 +8140,7 @@
                   <a:srgbClr val="8A6D1E"/>
                 </a:solidFill>
                 <a:latin typeface="Amiri" pitchFamily="2" charset="-78"/>
+                <a:ea typeface="Amiri" pitchFamily="2" charset="-78"/>
                 <a:cs typeface="Amiri" pitchFamily="2" charset="-78"/>
               </a:rPr>
               <a:t>أ</a:t>
@@ -8154,6 +8205,7 @@
                   <a:srgbClr val="1B3B6F"/>
                 </a:solidFill>
                 <a:latin typeface="Amiri" pitchFamily="2" charset="-78"/>
+                <a:ea typeface="Amiri" pitchFamily="2" charset="-78"/>
                 <a:cs typeface="Amiri" pitchFamily="2" charset="-78"/>
               </a:rPr>
               <a:t>أ</a:t>
@@ -8205,6 +8257,7 @@
                   <a:srgbClr val="8A6D1E"/>
                 </a:solidFill>
                 <a:latin typeface="Amiri" pitchFamily="2" charset="-78"/>
+                <a:ea typeface="Amiri" pitchFamily="2" charset="-78"/>
                 <a:cs typeface="Amiri" pitchFamily="2" charset="-78"/>
               </a:rPr>
               <a:t>نَمُوذَجُ الإِجَابَةِ</a:t>
@@ -8318,6 +8371,7 @@
                   <a:srgbClr val="1F2A37"/>
                 </a:solidFill>
                 <a:latin typeface="Amiri" pitchFamily="2" charset="-78"/>
+                <a:ea typeface="Amiri" pitchFamily="2" charset="-78"/>
                 <a:cs typeface="Amiri" pitchFamily="2" charset="-78"/>
               </a:rPr>
               <a:t>أَسْكُنُ فِي مَدِينَةِ مَانْشِسْتَرَ. تَقَعُ المَدِينَةُ فِي شَمَالِ غَرْبِ إِنْجِلْتِرَا، وَهِيَ مَدِينَةٌ كَبِيرَةٌ وَمَشْهُورَةٌ بِكُرَةِ القَدَمِ وَالمَطَرِ!</a:t>
@@ -8337,6 +8391,7 @@
                   <a:srgbClr val="1F2A37"/>
                 </a:solidFill>
                 <a:latin typeface="Amiri" pitchFamily="2" charset="-78"/>
+                <a:ea typeface="Amiri" pitchFamily="2" charset="-78"/>
                 <a:cs typeface="Amiri" pitchFamily="2" charset="-78"/>
               </a:rPr>
               <a:t>فِي حَيِّي يُوجَدُ مَسْجِدٌ وَمَكْتَبَةٌ، وَتُوجَدُ حَدِيقَةٌ كَبِيرَةٌ مُقَابِلَ بَيْتِي. يُوجَدُ أَيْضًا سُوقٌ قَدِيمٌ، وَأَشْتَرِي مِنْهُ الفَوَاكِهَ يَوْمَ السَّبْتِ، لِأَنَّهَا أَرْخَصُ مِنَ المَحَلَّاتِ الكَبِيرَةِ. الجَوُّ فِي الشِّتَاءِ بَارِدٌ، وَتُمْطِرُ كَثِيرًا، أَمَّا فِي الصَّيْفِ فَالجَوُّ مُعْتَدِلٌ.</a:t>
@@ -8356,6 +8411,7 @@
                   <a:srgbClr val="1F2A37"/>
                 </a:solidFill>
                 <a:latin typeface="Amiri" pitchFamily="2" charset="-78"/>
+                <a:ea typeface="Amiri" pitchFamily="2" charset="-78"/>
                 <a:cs typeface="Amiri" pitchFamily="2" charset="-78"/>
               </a:rPr>
               <a:t>لِلْأَسَفِ فِي المَدِينَةِ مَشَاكِلُ بِيئِيَّةٌ. أَكْبَرُ مُشْكِلَةٍ تَلَوُّثُ الهَوَاءِ بِسَبَبِ السَّيَّارَاتِ الكَثِيرَةِ، مِمَّا يُسَبِّبُ أَمْرَاضًا لِلنَّاسِ، خُصُوصًا لِلْأَطْفَالِ. فِي السَّنَةِ المَاضِيَةِ زَرَعْنَا مَعَ المَدْرَسَةِ ثَلَاثِينَ شَجَرَةً فِي الحَدِيقَةِ، وَنَظَّفْنَا الشَّارِعَ مِنَ القِمَامَةِ.</a:t>
@@ -8375,6 +8431,7 @@
                   <a:srgbClr val="1F2A37"/>
                 </a:solidFill>
                 <a:latin typeface="Amiri" pitchFamily="2" charset="-78"/>
+                <a:ea typeface="Amiri" pitchFamily="2" charset="-78"/>
                 <a:cs typeface="Amiri" pitchFamily="2" charset="-78"/>
               </a:rPr>
               <a:t>كَانَتِ المَدِينَةُ أَصْغَرَ فِي المَاضِي، أَمَّا الآنَ فَهِيَ أَكْبَرُ وَأَكْثَرُ ازْدِحَامًا. يَجِبُ عَلَى البَلَدِيَّةِ أَنْ تُحَسِّنَ الحَافِلَاتِ، وَيَجِبُ عَلَيْنَا أَنْ نَمْشِيَ أَكْثَرَ. فِي المُسْتَقْبَلِ أُرِيدُ أَنْ تَكُونَ مَدِينَتِي أَنْظَفَ وَأَكْثَرَ خُضْرَةً.</a:t>
@@ -8538,11 +8595,12 @@
               <a:buNone/>
             </a:pPr>
             <a:r>
-              <a:rPr lang="en-US" sz="950" b="1" dirty="0">
+              <a:rPr lang="ar-SA" sz="950" b="1" dirty="0">
                 <a:solidFill>
                   <a:srgbClr val="FFFFFF"/>
                 </a:solidFill>
                 <a:latin typeface="Calibri" pitchFamily="34" charset="0"/>
+                <a:ea typeface="Amiri" pitchFamily="2" charset="-78"/>
                 <a:cs typeface="Amiri" pitchFamily="2" charset="-78"/>
               </a:rPr>
               <a:t>تَقَعُ المَدِينَةُ فِي</a:t>
@@ -8603,11 +8661,12 @@
               <a:buNone/>
             </a:pPr>
             <a:r>
-              <a:rPr lang="en-US" sz="950" b="1" dirty="0">
+              <a:rPr lang="ar-SA" sz="950" b="1" dirty="0">
                 <a:solidFill>
                   <a:srgbClr val="FFFFFF"/>
                 </a:solidFill>
                 <a:latin typeface="Calibri" pitchFamily="34" charset="0"/>
+                <a:ea typeface="Amiri" pitchFamily="2" charset="-78"/>
                 <a:cs typeface="Amiri" pitchFamily="2" charset="-78"/>
               </a:rPr>
               <a:t>تُوجَدُ حَدِيقَةٌ</a:t>
@@ -8668,11 +8727,12 @@
               <a:buNone/>
             </a:pPr>
             <a:r>
-              <a:rPr lang="en-US" sz="950" b="1" dirty="0">
+              <a:rPr lang="ar-SA" sz="950" b="1" dirty="0">
                 <a:solidFill>
                   <a:srgbClr val="FFFFFF"/>
                 </a:solidFill>
                 <a:latin typeface="Calibri" pitchFamily="34" charset="0"/>
+                <a:ea typeface="Amiri" pitchFamily="2" charset="-78"/>
                 <a:cs typeface="Amiri" pitchFamily="2" charset="-78"/>
               </a:rPr>
               <a:t>بِسَبَبِ … مِمَّا</a:t>
@@ -8733,11 +8793,12 @@
               <a:buNone/>
             </a:pPr>
             <a:r>
-              <a:rPr lang="en-US" sz="950" b="1" dirty="0">
+              <a:rPr lang="ar-SA" sz="950" b="1" dirty="0">
                 <a:solidFill>
                   <a:srgbClr val="FFFFFF"/>
                 </a:solidFill>
                 <a:latin typeface="Calibri" pitchFamily="34" charset="0"/>
+                <a:ea typeface="Amiri" pitchFamily="2" charset="-78"/>
                 <a:cs typeface="Amiri" pitchFamily="2" charset="-78"/>
               </a:rPr>
               <a:t>يَجِبُ عَلَى البَلَدِيَّةِ</a:t>
@@ -8871,6 +8932,7 @@
                   <a:srgbClr val="D4AF37"/>
                 </a:solidFill>
                 <a:latin typeface="Amiri" pitchFamily="2" charset="-78"/>
+                <a:ea typeface="Amiri" pitchFamily="2" charset="-78"/>
                 <a:cs typeface="Amiri" pitchFamily="2" charset="-78"/>
               </a:rPr>
               <a:t>م</a:t>
@@ -9128,6 +9190,7 @@
                   <a:srgbClr val="8A6D1E"/>
                 </a:solidFill>
                 <a:latin typeface="Amiri" pitchFamily="2" charset="-78"/>
+                <a:ea typeface="Amiri" pitchFamily="2" charset="-78"/>
                 <a:cs typeface="Amiri" pitchFamily="2" charset="-78"/>
               </a:rPr>
               <a:t>أ</a:t>
@@ -9192,6 +9255,7 @@
                   <a:srgbClr val="1B3B6F"/>
                 </a:solidFill>
                 <a:latin typeface="Amiri" pitchFamily="2" charset="-78"/>
+                <a:ea typeface="Amiri" pitchFamily="2" charset="-78"/>
                 <a:cs typeface="Amiri" pitchFamily="2" charset="-78"/>
               </a:rPr>
               <a:t>أ</a:t>
@@ -9243,6 +9307,7 @@
                   <a:srgbClr val="8A6D1E"/>
                 </a:solidFill>
                 <a:latin typeface="Amiri" pitchFamily="2" charset="-78"/>
+                <a:ea typeface="Amiri" pitchFamily="2" charset="-78"/>
                 <a:cs typeface="Amiri" pitchFamily="2" charset="-78"/>
               </a:rPr>
               <a:t>نَمُوذَجُ الإِجَابَةِ</a:t>
@@ -9356,6 +9421,7 @@
                   <a:srgbClr val="1F2A37"/>
                 </a:solidFill>
                 <a:latin typeface="Amiri" pitchFamily="2" charset="-78"/>
+                <a:ea typeface="Amiri" pitchFamily="2" charset="-78"/>
                 <a:cs typeface="Amiri" pitchFamily="2" charset="-78"/>
               </a:rPr>
               <a:t>يَقُولُ جَدِّي إِنَّهُ حِينَ وَصَلَ إِلَى مَانْشِسْتَرَ قَبْلَ خَمْسِينَ عَامًا، كَانَتْ سَمَاؤُهَا رَمَادِيَّةً مِنْ دُخَانِ المَصَانِعِ، وَكَانَتْ أَنْهَارُهَا سَوْدَاءَ. أَمَّا اليَوْمَ، فَأَسْتَطِيعُ أَنْ أَرَى البَطَّ يَسْبَحُ فِي القَنَاةِ القَرِيبَةِ مِنْ بَيْتِنَا، وَأَرْكَبُ دَرَّاجَتِي عَلَى ضِفَّتِهَا كُلَّ صَبَاحٍ.</a:t>
@@ -9375,6 +9441,7 @@
                   <a:srgbClr val="1F2A37"/>
                 </a:solidFill>
                 <a:latin typeface="Amiri" pitchFamily="2" charset="-78"/>
+                <a:ea typeface="Amiri" pitchFamily="2" charset="-78"/>
                 <a:cs typeface="Amiri" pitchFamily="2" charset="-78"/>
               </a:rPr>
               <a:t>فَقَدْ تَغَيَّرَتِ المَدِينَةُ كَثِيرًا خِلَالَ نِصْفِ قَرْنٍ؛ إِذْ أُغْلِقَتِ المَصَانِعُ القَدِيمَةُ، وَتَحَوَّلَ بَعْضُهَا إِلَى مَتَاحِفَ وَمَكَاتِبَ، وَبُنِيَتْ خُطُوطُ التِّرَامِ الَّتِي تَرْبِطُ الأَحْيَاءَ بِوَسَطِ المَدِينَةِ، مِمَّا قَلَّلَ عَدَدَ السَّيَّارَاتِ فِي الشَّوَارِعِ.</a:t>
@@ -9394,6 +9461,7 @@
                   <a:srgbClr val="1F2A37"/>
                 </a:solidFill>
                 <a:latin typeface="Amiri" pitchFamily="2" charset="-78"/>
+                <a:ea typeface="Amiri" pitchFamily="2" charset="-78"/>
                 <a:cs typeface="Amiri" pitchFamily="2" charset="-78"/>
               </a:rPr>
               <a:t>غَيْرَ أَنَّ التَّحَدِّيَاتِ لَمْ تَنْتَهِ؛ فَبِسَبَبِ الزِّحَامِ المُتَزَايِدِ، مَا زَالَ الهَوَاءُ مُلَوَّثًا قُرْبَ الطُّرُقِ الكَبِيرَةِ، مِمَّا يُؤَدِّي إِلَى أَمْرَاضِ الرَّبْوِ عِنْدَ الأَطْفَالِ. لِذٰلِكَ انْضَمَمْتُ إِلَى نَادِي البِيئَةِ، وَشَارَكْتُ فِي زِرَاعَةِ مِئَةِ شَجَرَةٍ فِي حَيِّنَا، وَفِي حَمْلَةٍ لِإِقْنَاعِ الآبَاءِ بِإِطْفَاءِ مُحَرِّكَاتِ سَيَّارَاتِهِمْ أَمَامَ المَدْرَسَةِ.</a:t>
@@ -9413,6 +9481,7 @@
                   <a:srgbClr val="1F2A37"/>
                 </a:solidFill>
                 <a:latin typeface="Amiri" pitchFamily="2" charset="-78"/>
+                <a:ea typeface="Amiri" pitchFamily="2" charset="-78"/>
                 <a:cs typeface="Amiri" pitchFamily="2" charset="-78"/>
               </a:rPr>
               <a:t>أَرَى أَنَّ المُسْتَقْبَلَ فِي أَيْدِينَا: فَإِذَا اسْتَخْدَمْنَا المُوَاصَلَاتِ العَامَّةَ وَالدَّرَّاجَاتِ، فَسَتُصْبِحُ مَدِينَتُنَا أَنْظَفَ وَأَهْدَأَ. وَلَوْ رَآهَا جَدِّي بَعْدَ عِشْرِينَ عَامًا، لَمَا عَرَفَهَا مِنْ شِدَّةِ خُضْرَتِهَا.</a:t>
@@ -9511,11 +9580,12 @@
               <a:buNone/>
             </a:pPr>
             <a:r>
-              <a:rPr lang="en-US" sz="950" b="1" dirty="0">
+              <a:rPr lang="ar-SA" sz="950" b="1" dirty="0">
                 <a:solidFill>
                   <a:srgbClr val="FFFFFF"/>
                 </a:solidFill>
                 <a:latin typeface="Calibri" pitchFamily="34" charset="0"/>
+                <a:ea typeface="Amiri" pitchFamily="2" charset="-78"/>
                 <a:cs typeface="Amiri" pitchFamily="2" charset="-78"/>
               </a:rPr>
               <a:t>كَانَتْ سَمَاؤُهَا رَمَادِيَّةً</a:t>
@@ -9576,11 +9646,12 @@
               <a:buNone/>
             </a:pPr>
             <a:r>
-              <a:rPr lang="en-US" sz="950" b="1" dirty="0">
+              <a:rPr lang="ar-SA" sz="950" b="1" dirty="0">
                 <a:solidFill>
                   <a:srgbClr val="FFFFFF"/>
                 </a:solidFill>
                 <a:latin typeface="Calibri" pitchFamily="34" charset="0"/>
+                <a:ea typeface="Amiri" pitchFamily="2" charset="-78"/>
                 <a:cs typeface="Amiri" pitchFamily="2" charset="-78"/>
               </a:rPr>
               <a:t>أُغْلِقَتْ … وَبُنِيَتْ</a:t>
@@ -9641,11 +9712,12 @@
               <a:buNone/>
             </a:pPr>
             <a:r>
-              <a:rPr lang="en-US" sz="950" b="1" dirty="0">
+              <a:rPr lang="ar-SA" sz="950" b="1" dirty="0">
                 <a:solidFill>
                   <a:srgbClr val="FFFFFF"/>
                 </a:solidFill>
                 <a:latin typeface="Calibri" pitchFamily="34" charset="0"/>
+                <a:ea typeface="Amiri" pitchFamily="2" charset="-78"/>
                 <a:cs typeface="Amiri" pitchFamily="2" charset="-78"/>
               </a:rPr>
               <a:t>مِمَّا يُؤَدِّي إِلَى</a:t>
@@ -9706,11 +9778,12 @@
               <a:buNone/>
             </a:pPr>
             <a:r>
-              <a:rPr lang="en-US" sz="950" b="1" dirty="0">
+              <a:rPr lang="ar-SA" sz="950" b="1" dirty="0">
                 <a:solidFill>
                   <a:srgbClr val="FFFFFF"/>
                 </a:solidFill>
                 <a:latin typeface="Calibri" pitchFamily="34" charset="0"/>
+                <a:ea typeface="Amiri" pitchFamily="2" charset="-78"/>
                 <a:cs typeface="Amiri" pitchFamily="2" charset="-78"/>
               </a:rPr>
               <a:t>لَوْ رَآهَا … لَمَا عَرَفَهَا</a:t>
@@ -9844,6 +9917,7 @@
                   <a:srgbClr val="D4AF37"/>
                 </a:solidFill>
                 <a:latin typeface="Amiri" pitchFamily="2" charset="-78"/>
+                <a:ea typeface="Amiri" pitchFamily="2" charset="-78"/>
                 <a:cs typeface="Amiri" pitchFamily="2" charset="-78"/>
               </a:rPr>
               <a:t>م</a:t>
@@ -10101,6 +10175,7 @@
                   <a:srgbClr val="8A6D1E"/>
                 </a:solidFill>
                 <a:latin typeface="Amiri" pitchFamily="2" charset="-78"/>
+                <a:ea typeface="Amiri" pitchFamily="2" charset="-78"/>
                 <a:cs typeface="Amiri" pitchFamily="2" charset="-78"/>
               </a:rPr>
               <a:t>ب</a:t>
@@ -10165,6 +10240,7 @@
                   <a:srgbClr val="1B3B6F"/>
                 </a:solidFill>
                 <a:latin typeface="Amiri" pitchFamily="2" charset="-78"/>
+                <a:ea typeface="Amiri" pitchFamily="2" charset="-78"/>
                 <a:cs typeface="Amiri" pitchFamily="2" charset="-78"/>
               </a:rPr>
               <a:t>ب</a:t>
@@ -10216,6 +10292,7 @@
                   <a:srgbClr val="8A6D1E"/>
                 </a:solidFill>
                 <a:latin typeface="Amiri" pitchFamily="2" charset="-78"/>
+                <a:ea typeface="Amiri" pitchFamily="2" charset="-78"/>
                 <a:cs typeface="Amiri" pitchFamily="2" charset="-78"/>
               </a:rPr>
               <a:t>نَمُوذَجُ الإِجَابَةِ</a:t>
@@ -10329,6 +10406,7 @@
                   <a:srgbClr val="1F2A37"/>
                 </a:solidFill>
                 <a:latin typeface="Amiri" pitchFamily="2" charset="-78"/>
+                <a:ea typeface="Amiri" pitchFamily="2" charset="-78"/>
                 <a:cs typeface="Amiri" pitchFamily="2" charset="-78"/>
               </a:rPr>
               <a:t>نَحْمِلُ فِي جُيُوبِنَا أَجْهِزَةً أَقْوَى مِنَ الحَوَاسِيبِ الَّتِي أَوْصَلَتِ الإِنْسَانَ إِلَى القَمَرِ، وَمَعَ ذٰلِكَ تَزْدَادُ مَشَاكِلُ كَوْكَبِنَا كُلَّ عَامٍ. فَهَلْ تُنْقِذُ التِّكْنُولُوجْيَا البِيئَةَ أَمْ تَضُرُّهَا؟</a:t>
@@ -10348,6 +10426,7 @@
                   <a:srgbClr val="1F2A37"/>
                 </a:solidFill>
                 <a:latin typeface="Amiri" pitchFamily="2" charset="-78"/>
+                <a:ea typeface="Amiri" pitchFamily="2" charset="-78"/>
                 <a:cs typeface="Amiri" pitchFamily="2" charset="-78"/>
               </a:rPr>
               <a:t>مِنْ نَاحِيَةٍ، تُقَدِّمُ التِّكْنُولُوجْيَا حُلُولًا رَائِعَةً، كَالطَّاقَةِ الشَّمْسِيَّةِ وَالسَّيَّارَاتِ الكَهْرَبَائِيَّةِ وَالتَّطْبِيقَاتِ الَّتِي تَقِيسُ اسْتِهْلَاكَ المَاءِ وَالكَهْرَبَاءِ فِي البُيُوتِ، فَتُسَاعِدُ العَائِلَاتِ عَلَى التَّوْفِيرِ. وَمِنْ نَاحِيَةٍ أُخْرَى، تُصْنَعُ الأَجْهِزَةُ مِنْ مَعَادِنَ نَادِرَةٍ وَغَالِيَةٍ، ثُمَّ تُرْمَى بَعْدَ سَنَتَيْنِ أَوْ ثَلَاثٍ، مِمَّا يَخْلُقُ جِبَالًا مِنَ النُّفَايَاتِ الإِلِكْتُرُونِيَّةِ، يُرْسَلُ أَغْلَبُهَا إِلَى دُوَلٍ فَقِيرَةٍ.</a:t>
@@ -10367,6 +10446,7 @@
                   <a:srgbClr val="1F2A37"/>
                 </a:solidFill>
                 <a:latin typeface="Amiri" pitchFamily="2" charset="-78"/>
+                <a:ea typeface="Amiri" pitchFamily="2" charset="-78"/>
                 <a:cs typeface="Amiri" pitchFamily="2" charset="-78"/>
               </a:rPr>
               <a:t>وَقَدْ قَرَّرْتُ أَنْ أُغَيِّرَ عَادَاتِي بَعْدَ أَنْ شَاهَدْتُ فِيلْمًا وَثَائِقِيًّا عَنْ مَكَبٍّ فِي غَانَا يَحْرِقُ فِيهِ الأَطْفَالُ الأَجْهِزَةَ القَدِيمَةَ؛ فَأَصْلَحْتُ هَاتِفِي بَدَلًا مِنْ تَغْيِيرِهِ، وَأَقْنَعْتُ أُسْرَتِي بِأَنْ نُعِيدَ تَدْوِيرَ الأَجْهِزَةِ القَدِيمَةِ بَدَلًا مِنْ رَمْيِهَا فِي القِمَامَةِ.</a:t>
@@ -10386,6 +10466,7 @@
                   <a:srgbClr val="1F2A37"/>
                 </a:solidFill>
                 <a:latin typeface="Amiri" pitchFamily="2" charset="-78"/>
+                <a:ea typeface="Amiri" pitchFamily="2" charset="-78"/>
                 <a:cs typeface="Amiri" pitchFamily="2" charset="-78"/>
               </a:rPr>
               <a:t>لِذٰلِكَ أَرَى أَنَّ التِّكْنُولُوجْيَا أَدَاةٌ، لَا مُنْقِذٌ وَلَا عَدُوٌّ. فَإِذَا صُنِعَتِ الأَجْهِزَةُ لِتَعِيشَ طَوِيلًا، فَسَتُصْبِحُ جُزْءًا مِنَ الحَلِّ لَا مِنَ المُشْكِلَةِ الَّتِي نَعِيشُهَا اليَوْمَ.</a:t>
@@ -10484,11 +10565,12 @@
               <a:buNone/>
             </a:pPr>
             <a:r>
-              <a:rPr lang="en-US" sz="950" b="1" dirty="0">
+              <a:rPr lang="ar-SA" sz="950" b="1" dirty="0">
                 <a:solidFill>
                   <a:srgbClr val="FFFFFF"/>
                 </a:solidFill>
                 <a:latin typeface="Calibri" pitchFamily="34" charset="0"/>
+                <a:ea typeface="Amiri" pitchFamily="2" charset="-78"/>
                 <a:cs typeface="Amiri" pitchFamily="2" charset="-78"/>
               </a:rPr>
               <a:t>أَقْوَى مِنَ … الَّتِي</a:t>
@@ -10549,11 +10631,12 @@
               <a:buNone/>
             </a:pPr>
             <a:r>
-              <a:rPr lang="en-US" sz="950" b="1" dirty="0">
+              <a:rPr lang="ar-SA" sz="950" b="1" dirty="0">
                 <a:solidFill>
                   <a:srgbClr val="FFFFFF"/>
                 </a:solidFill>
                 <a:latin typeface="Calibri" pitchFamily="34" charset="0"/>
+                <a:ea typeface="Amiri" pitchFamily="2" charset="-78"/>
                 <a:cs typeface="Amiri" pitchFamily="2" charset="-78"/>
               </a:rPr>
               <a:t>تُصْنَعُ … ثُمَّ تُرْمَى</a:t>
@@ -10614,11 +10697,12 @@
               <a:buNone/>
             </a:pPr>
             <a:r>
-              <a:rPr lang="en-US" sz="950" b="1" dirty="0">
+              <a:rPr lang="ar-SA" sz="950" b="1" dirty="0">
                 <a:solidFill>
                   <a:srgbClr val="FFFFFF"/>
                 </a:solidFill>
                 <a:latin typeface="Calibri" pitchFamily="34" charset="0"/>
+                <a:ea typeface="Amiri" pitchFamily="2" charset="-78"/>
                 <a:cs typeface="Amiri" pitchFamily="2" charset="-78"/>
               </a:rPr>
               <a:t>بَدَلًا مِنْ تَغْيِيرِهِ</a:t>
@@ -10679,11 +10763,12 @@
               <a:buNone/>
             </a:pPr>
             <a:r>
-              <a:rPr lang="en-US" sz="950" b="1" dirty="0">
+              <a:rPr lang="ar-SA" sz="950" b="1" dirty="0">
                 <a:solidFill>
                   <a:srgbClr val="FFFFFF"/>
                 </a:solidFill>
                 <a:latin typeface="Calibri" pitchFamily="34" charset="0"/>
+                <a:ea typeface="Amiri" pitchFamily="2" charset="-78"/>
                 <a:cs typeface="Amiri" pitchFamily="2" charset="-78"/>
               </a:rPr>
               <a:t>لَا مُنْقِذٌ وَلَا عَدُوٌّ</a:t>
@@ -10817,6 +10902,7 @@
                   <a:srgbClr val="D4AF37"/>
                 </a:solidFill>
                 <a:latin typeface="Amiri" pitchFamily="2" charset="-78"/>
+                <a:ea typeface="Amiri" pitchFamily="2" charset="-78"/>
                 <a:cs typeface="Amiri" pitchFamily="2" charset="-78"/>
               </a:rPr>
               <a:t>م</a:t>
@@ -11137,6 +11223,7 @@
                   <a:srgbClr val="8A6D1E"/>
                 </a:solidFill>
                 <a:latin typeface="Amiri" pitchFamily="2" charset="-78"/>
+                <a:ea typeface="Amiri" pitchFamily="2" charset="-78"/>
                 <a:cs typeface="Amiri" pitchFamily="2" charset="-78"/>
               </a:rPr>
               <a:t>قَيِّمْ عَمَلَكَ</a:t>
@@ -12381,6 +12468,7 @@
                   <a:srgbClr val="FFFFFF"/>
                 </a:solidFill>
                 <a:latin typeface="Amiri" pitchFamily="2" charset="-78"/>
+                <a:ea typeface="Amiri" pitchFamily="2" charset="-78"/>
                 <a:cs typeface="Amiri" pitchFamily="2" charset="-78"/>
               </a:rPr>
               <a:t>أَحْسَنْتُمْ! إِلَى اللِّقَاءِ</a:t>
@@ -12533,6 +12621,7 @@
                   <a:srgbClr val="D4AF37"/>
                 </a:solidFill>
                 <a:latin typeface="Amiri" pitchFamily="2" charset="-78"/>
+                <a:ea typeface="Amiri" pitchFamily="2" charset="-78"/>
                 <a:cs typeface="Amiri" pitchFamily="2" charset="-78"/>
               </a:rPr>
               <a:t>وَرْشَةُ التَّدْرِيبِ</a:t>
@@ -12666,6 +12755,7 @@
                   <a:srgbClr val="D4AF37"/>
                 </a:solidFill>
                 <a:latin typeface="Amiri" pitchFamily="2" charset="-78"/>
+                <a:ea typeface="Amiri" pitchFamily="2" charset="-78"/>
                 <a:cs typeface="Amiri" pitchFamily="2" charset="-78"/>
               </a:rPr>
               <a:t>م</a:t>
@@ -12986,6 +13076,7 @@
                   <a:srgbClr val="8A6D1E"/>
                 </a:solidFill>
                 <a:latin typeface="Amiri" pitchFamily="2" charset="-78"/>
+                <a:ea typeface="Amiri" pitchFamily="2" charset="-78"/>
                 <a:cs typeface="Amiri" pitchFamily="2" charset="-78"/>
               </a:rPr>
               <a:t>آدَابُ الصَّفِّ</a:t>
@@ -14517,6 +14608,7 @@
                   <a:srgbClr val="D4AF37"/>
                 </a:solidFill>
                 <a:latin typeface="Amiri" pitchFamily="2" charset="-78"/>
+                <a:ea typeface="Amiri" pitchFamily="2" charset="-78"/>
                 <a:cs typeface="Amiri" pitchFamily="2" charset="-78"/>
               </a:rPr>
               <a:t>م</a:t>
@@ -14837,6 +14929,7 @@
                   <a:srgbClr val="8A6D1E"/>
                 </a:solidFill>
                 <a:latin typeface="Amiri" pitchFamily="2" charset="-78"/>
+                <a:ea typeface="Amiri" pitchFamily="2" charset="-78"/>
                 <a:cs typeface="Amiri" pitchFamily="2" charset="-78"/>
               </a:rPr>
               <a:t>خَرِيطَةُ الوَرْشَةِ</a:t>
@@ -15151,6 +15244,7 @@
                   <a:srgbClr val="1B3B6F"/>
                 </a:solidFill>
                 <a:latin typeface="Amiri" pitchFamily="2" charset="-78"/>
+                <a:ea typeface="Amiri" pitchFamily="2" charset="-78"/>
                 <a:cs typeface="Amiri" pitchFamily="2" charset="-78"/>
               </a:rPr>
               <a:t>كَيْفَ</a:t>
@@ -15427,6 +15521,7 @@
                   <a:srgbClr val="1E6B52"/>
                 </a:solidFill>
                 <a:latin typeface="Amiri" pitchFamily="2" charset="-78"/>
+                <a:ea typeface="Amiri" pitchFamily="2" charset="-78"/>
                 <a:cs typeface="Amiri" pitchFamily="2" charset="-78"/>
               </a:rPr>
               <a:t>الاسْتِمَارَةُ</a:t>
@@ -15703,6 +15798,7 @@
                   <a:srgbClr val="1E6B52"/>
                 </a:solidFill>
                 <a:latin typeface="Amiri" pitchFamily="2" charset="-78"/>
+                <a:ea typeface="Amiri" pitchFamily="2" charset="-78"/>
                 <a:cs typeface="Amiri" pitchFamily="2" charset="-78"/>
               </a:rPr>
               <a:t>الرِّسَالَةُ</a:t>
@@ -15979,6 +16075,7 @@
                   <a:srgbClr val="1E6B52"/>
                 </a:solidFill>
                 <a:latin typeface="Amiri" pitchFamily="2" charset="-78"/>
+                <a:ea typeface="Amiri" pitchFamily="2" charset="-78"/>
                 <a:cs typeface="Amiri" pitchFamily="2" charset="-78"/>
               </a:rPr>
               <a:t>المَقَالُ</a:t>
@@ -16255,6 +16352,7 @@
                   <a:srgbClr val="8A6D1E"/>
                 </a:solidFill>
                 <a:latin typeface="Amiri" pitchFamily="2" charset="-78"/>
+                <a:ea typeface="Amiri" pitchFamily="2" charset="-78"/>
                 <a:cs typeface="Amiri" pitchFamily="2" charset="-78"/>
               </a:rPr>
               <a:t>قَيِّمْ</a:t>
@@ -16498,6 +16596,7 @@
                   <a:srgbClr val="D4AF37"/>
                 </a:solidFill>
                 <a:latin typeface="Amiri" pitchFamily="2" charset="-78"/>
+                <a:ea typeface="Amiri" pitchFamily="2" charset="-78"/>
                 <a:cs typeface="Amiri" pitchFamily="2" charset="-78"/>
               </a:rPr>
               <a:t>م</a:t>
@@ -16818,6 +16917,7 @@
                   <a:srgbClr val="8A6D1E"/>
                 </a:solidFill>
                 <a:latin typeface="Amiri" pitchFamily="2" charset="-78"/>
+                <a:ea typeface="Amiri" pitchFamily="2" charset="-78"/>
                 <a:cs typeface="Amiri" pitchFamily="2" charset="-78"/>
               </a:rPr>
               <a:t>امْتِحَانُ الكِتَابَةِ</a:t>
@@ -17442,6 +17542,7 @@
                   <a:srgbClr val="1B3B6F"/>
                 </a:solidFill>
                 <a:latin typeface="Amiri" pitchFamily="2" charset="-78"/>
+                <a:ea typeface="Amiri" pitchFamily="2" charset="-78"/>
                 <a:cs typeface="Amiri" pitchFamily="2" charset="-78"/>
               </a:rPr>
               <a:t>تَقَعُ المِنْطَقَةُ فِي شَمَالِ غَرْبِ إِنْجِلْتِرَا</a:t>
@@ -17541,6 +17642,7 @@
                   <a:srgbClr val="1B3B6F"/>
                 </a:solidFill>
                 <a:latin typeface="Amiri" pitchFamily="2" charset="-78"/>
+                <a:ea typeface="Amiri" pitchFamily="2" charset="-78"/>
                 <a:cs typeface="Amiri" pitchFamily="2" charset="-78"/>
               </a:rPr>
               <a:t>رَأَيْنَا قِمَامَةً كَثِيرَةً بِسَبَبِ السُّيَّاحِ، لِذٰلِكَ جَمَعْنَا …</a:t>
@@ -17640,6 +17742,7 @@
                   <a:srgbClr val="1B3B6F"/>
                 </a:solidFill>
                 <a:latin typeface="Amiri" pitchFamily="2" charset="-78"/>
+                <a:ea typeface="Amiri" pitchFamily="2" charset="-78"/>
                 <a:cs typeface="Amiri" pitchFamily="2" charset="-78"/>
               </a:rPr>
               <a:t>يَجِبُ عَلَى البَلَدِيَّةِ أَنْ تُحَسِّنَ …</a:t>
@@ -17811,6 +17914,7 @@
                   <a:srgbClr val="D4AF37"/>
                 </a:solidFill>
                 <a:latin typeface="Amiri" pitchFamily="2" charset="-78"/>
+                <a:ea typeface="Amiri" pitchFamily="2" charset="-78"/>
                 <a:cs typeface="Amiri" pitchFamily="2" charset="-78"/>
               </a:rPr>
               <a:t>م</a:t>
@@ -18131,6 +18235,7 @@
                   <a:srgbClr val="8A6D1E"/>
                 </a:solidFill>
                 <a:latin typeface="Amiri" pitchFamily="2" charset="-78"/>
+                <a:ea typeface="Amiri" pitchFamily="2" charset="-78"/>
                 <a:cs typeface="Amiri" pitchFamily="2" charset="-78"/>
               </a:rPr>
               <a:t>اسْتِمَارَةُ حَجْزِ فُنْدُقٍ</a:t>
@@ -18487,6 +18592,7 @@
                   <a:srgbClr val="1B3B6F"/>
                 </a:solidFill>
                 <a:latin typeface="Amiri" pitchFamily="2" charset="-78"/>
+                <a:ea typeface="Amiri" pitchFamily="2" charset="-78"/>
                 <a:cs typeface="Amiri" pitchFamily="2" charset="-78"/>
               </a:rPr>
               <a:t>الاسْمُ</a:t>
@@ -18731,6 +18837,7 @@
                   <a:srgbClr val="1B3B6F"/>
                 </a:solidFill>
                 <a:latin typeface="Amiri" pitchFamily="2" charset="-78"/>
+                <a:ea typeface="Amiri" pitchFamily="2" charset="-78"/>
                 <a:cs typeface="Amiri" pitchFamily="2" charset="-78"/>
               </a:rPr>
               <a:t>تَارِيخُ الوُصُولِ</a:t>
@@ -18975,6 +19082,7 @@
                   <a:srgbClr val="1B3B6F"/>
                 </a:solidFill>
                 <a:latin typeface="Amiri" pitchFamily="2" charset="-78"/>
+                <a:ea typeface="Amiri" pitchFamily="2" charset="-78"/>
                 <a:cs typeface="Amiri" pitchFamily="2" charset="-78"/>
               </a:rPr>
               <a:t>عَدَدُ اللَّيَالِي</a:t>
@@ -19219,6 +19327,7 @@
                   <a:srgbClr val="1B3B6F"/>
                 </a:solidFill>
                 <a:latin typeface="Amiri" pitchFamily="2" charset="-78"/>
+                <a:ea typeface="Amiri" pitchFamily="2" charset="-78"/>
                 <a:cs typeface="Amiri" pitchFamily="2" charset="-78"/>
               </a:rPr>
               <a:t>نَوْعُ الغُرْفَةِ</a:t>
@@ -19463,6 +19572,7 @@
                   <a:srgbClr val="1B3B6F"/>
                 </a:solidFill>
                 <a:latin typeface="Amiri" pitchFamily="2" charset="-78"/>
+                <a:ea typeface="Amiri" pitchFamily="2" charset="-78"/>
                 <a:cs typeface="Amiri" pitchFamily="2" charset="-78"/>
               </a:rPr>
               <a:t>وَسِيلَةُ الوُصُولِ</a:t>
@@ -19707,6 +19817,7 @@
                   <a:srgbClr val="1B3B6F"/>
                 </a:solidFill>
                 <a:latin typeface="Amiri" pitchFamily="2" charset="-78"/>
+                <a:ea typeface="Amiri" pitchFamily="2" charset="-78"/>
                 <a:cs typeface="Amiri" pitchFamily="2" charset="-78"/>
               </a:rPr>
               <a:t>رَقْمُ الهَاتِفِ</a:t>
@@ -19951,6 +20062,7 @@
                   <a:srgbClr val="1B3B6F"/>
                 </a:solidFill>
                 <a:latin typeface="Amiri" pitchFamily="2" charset="-78"/>
+                <a:ea typeface="Amiri" pitchFamily="2" charset="-78"/>
                 <a:cs typeface="Amiri" pitchFamily="2" charset="-78"/>
               </a:rPr>
               <a:t>طَلَبٌ خَاصٌّ</a:t>
@@ -20130,6 +20242,7 @@
                   <a:srgbClr val="1B3B6F"/>
                 </a:solidFill>
                 <a:latin typeface="Amiri" pitchFamily="2" charset="-78"/>
+                <a:ea typeface="Amiri" pitchFamily="2" charset="-78"/>
                 <a:cs typeface="Amiri" pitchFamily="2" charset="-78"/>
               </a:rPr>
               <a:t>جُمْلَةٌ: لِمَاذَا اخْتَرْتَ هٰذَا الفُنْدُقَ؟</a:t>
@@ -20339,6 +20452,7 @@
                   <a:srgbClr val="D4AF37"/>
                 </a:solidFill>
                 <a:latin typeface="Amiri" pitchFamily="2" charset="-78"/>
+                <a:ea typeface="Amiri" pitchFamily="2" charset="-78"/>
                 <a:cs typeface="Amiri" pitchFamily="2" charset="-78"/>
               </a:rPr>
               <a:t>م</a:t>
@@ -20659,6 +20773,7 @@
                   <a:srgbClr val="8A6D1E"/>
                 </a:solidFill>
                 <a:latin typeface="Amiri" pitchFamily="2" charset="-78"/>
+                <a:ea typeface="Amiri" pitchFamily="2" charset="-78"/>
                 <a:cs typeface="Amiri" pitchFamily="2" charset="-78"/>
               </a:rPr>
               <a:t>نَمُوذَجُ الإِجَابَةِ</a:t>
@@ -20977,6 +21092,7 @@
                   <a:srgbClr val="1B3B6F"/>
                 </a:solidFill>
                 <a:latin typeface="Amiri" pitchFamily="2" charset="-78"/>
+                <a:ea typeface="Amiri" pitchFamily="2" charset="-78"/>
                 <a:cs typeface="Amiri" pitchFamily="2" charset="-78"/>
               </a:rPr>
               <a:t>عَادِلٌ مَحْمُودٌ</a:t>
@@ -21015,6 +21131,7 @@
                   <a:srgbClr val="1B3B6F"/>
                 </a:solidFill>
                 <a:latin typeface="Amiri" pitchFamily="2" charset="-78"/>
+                <a:ea typeface="Amiri" pitchFamily="2" charset="-78"/>
                 <a:cs typeface="Amiri" pitchFamily="2" charset="-78"/>
               </a:rPr>
               <a:t>الاسْمُ</a:t>
@@ -21156,6 +21273,7 @@
                   <a:srgbClr val="1B3B6F"/>
                 </a:solidFill>
                 <a:latin typeface="Amiri" pitchFamily="2" charset="-78"/>
+                <a:ea typeface="Amiri" pitchFamily="2" charset="-78"/>
                 <a:cs typeface="Amiri" pitchFamily="2" charset="-78"/>
               </a:rPr>
               <a:t>العَاشِرُ مِنْ يُولْيُو</a:t>
@@ -21194,6 +21312,7 @@
                   <a:srgbClr val="1B3B6F"/>
                 </a:solidFill>
                 <a:latin typeface="Amiri" pitchFamily="2" charset="-78"/>
+                <a:ea typeface="Amiri" pitchFamily="2" charset="-78"/>
                 <a:cs typeface="Amiri" pitchFamily="2" charset="-78"/>
               </a:rPr>
               <a:t>تَارِيخُ الوُصُولِ</a:t>
@@ -21335,6 +21454,7 @@
                   <a:srgbClr val="1B3B6F"/>
                 </a:solidFill>
                 <a:latin typeface="Amiri" pitchFamily="2" charset="-78"/>
+                <a:ea typeface="Amiri" pitchFamily="2" charset="-78"/>
                 <a:cs typeface="Amiri" pitchFamily="2" charset="-78"/>
               </a:rPr>
               <a:t>ثَلَاثُ لَيَالٍ</a:t>
@@ -21373,6 +21493,7 @@
                   <a:srgbClr val="1B3B6F"/>
                 </a:solidFill>
                 <a:latin typeface="Amiri" pitchFamily="2" charset="-78"/>
+                <a:ea typeface="Amiri" pitchFamily="2" charset="-78"/>
                 <a:cs typeface="Amiri" pitchFamily="2" charset="-78"/>
               </a:rPr>
               <a:t>عَدَدُ اللَّيَالِي</a:t>
@@ -21514,6 +21635,7 @@
                   <a:srgbClr val="1B3B6F"/>
                 </a:solidFill>
                 <a:latin typeface="Amiri" pitchFamily="2" charset="-78"/>
+                <a:ea typeface="Amiri" pitchFamily="2" charset="-78"/>
                 <a:cs typeface="Amiri" pitchFamily="2" charset="-78"/>
               </a:rPr>
               <a:t>غُرْفَةٌ لِشَخْصَيْنِ</a:t>
@@ -21552,6 +21674,7 @@
                   <a:srgbClr val="1B3B6F"/>
                 </a:solidFill>
                 <a:latin typeface="Amiri" pitchFamily="2" charset="-78"/>
+                <a:ea typeface="Amiri" pitchFamily="2" charset="-78"/>
                 <a:cs typeface="Amiri" pitchFamily="2" charset="-78"/>
               </a:rPr>
               <a:t>نَوْعُ الغُرْفَةِ</a:t>
@@ -21693,6 +21816,7 @@
                   <a:srgbClr val="1B3B6F"/>
                 </a:solidFill>
                 <a:latin typeface="Amiri" pitchFamily="2" charset="-78"/>
+                <a:ea typeface="Amiri" pitchFamily="2" charset="-78"/>
                 <a:cs typeface="Amiri" pitchFamily="2" charset="-78"/>
               </a:rPr>
               <a:t>بِالقِطَارِ</a:t>
@@ -21731,6 +21855,7 @@
                   <a:srgbClr val="1B3B6F"/>
                 </a:solidFill>
                 <a:latin typeface="Amiri" pitchFamily="2" charset="-78"/>
+                <a:ea typeface="Amiri" pitchFamily="2" charset="-78"/>
                 <a:cs typeface="Amiri" pitchFamily="2" charset="-78"/>
               </a:rPr>
               <a:t>وَسِيلَةُ الوُصُولِ</a:t>
@@ -21872,6 +21997,7 @@
                   <a:srgbClr val="1B3B6F"/>
                 </a:solidFill>
                 <a:latin typeface="Amiri" pitchFamily="2" charset="-78"/>
+                <a:ea typeface="Amiri" pitchFamily="2" charset="-78"/>
                 <a:cs typeface="Amiri" pitchFamily="2" charset="-78"/>
               </a:rPr>
               <a:t>٠٧٧٠٠٩٠٠١٢٣</a:t>
@@ -21910,6 +22036,7 @@
                   <a:srgbClr val="1B3B6F"/>
                 </a:solidFill>
                 <a:latin typeface="Amiri" pitchFamily="2" charset="-78"/>
+                <a:ea typeface="Amiri" pitchFamily="2" charset="-78"/>
                 <a:cs typeface="Amiri" pitchFamily="2" charset="-78"/>
               </a:rPr>
               <a:t>رَقْمُ الهَاتِفِ</a:t>
@@ -22051,6 +22178,7 @@
                   <a:srgbClr val="1B3B6F"/>
                 </a:solidFill>
                 <a:latin typeface="Amiri" pitchFamily="2" charset="-78"/>
+                <a:ea typeface="Amiri" pitchFamily="2" charset="-78"/>
                 <a:cs typeface="Amiri" pitchFamily="2" charset="-78"/>
               </a:rPr>
               <a:t>غُرْفَةٌ هَادِئَةٌ بَعِيدَةٌ عَنِ الشَّارِعِ</a:t>
@@ -22089,6 +22217,7 @@
                   <a:srgbClr val="1B3B6F"/>
                 </a:solidFill>
                 <a:latin typeface="Amiri" pitchFamily="2" charset="-78"/>
+                <a:ea typeface="Amiri" pitchFamily="2" charset="-78"/>
                 <a:cs typeface="Amiri" pitchFamily="2" charset="-78"/>
               </a:rPr>
               <a:t>طَلَبٌ خَاصٌّ</a:t>
@@ -22230,6 +22359,7 @@
                   <a:srgbClr val="1B3B6F"/>
                 </a:solidFill>
                 <a:latin typeface="Amiri" pitchFamily="2" charset="-78"/>
+                <a:ea typeface="Amiri" pitchFamily="2" charset="-78"/>
                 <a:cs typeface="Amiri" pitchFamily="2" charset="-78"/>
               </a:rPr>
               <a:t>اخْتَرْتُهُ لِأَنَّهُ يَسْتَخْدِمُ الطَّاقَةَ الشَّمْسِيَّةَ، وَيَقَعُ قُرْبَ البَحْرِ.</a:t>
@@ -22268,6 +22398,7 @@
                   <a:srgbClr val="1B3B6F"/>
                 </a:solidFill>
                 <a:latin typeface="Amiri" pitchFamily="2" charset="-78"/>
+                <a:ea typeface="Amiri" pitchFamily="2" charset="-78"/>
                 <a:cs typeface="Amiri" pitchFamily="2" charset="-78"/>
               </a:rPr>
               <a:t>جُمْلَةٌ: لِمَاذَا اخْتَرْتَ هٰذَا الفُنْدُقَ؟</a:t>
@@ -22477,6 +22608,7 @@
                   <a:srgbClr val="D4AF37"/>
                 </a:solidFill>
                 <a:latin typeface="Amiri" pitchFamily="2" charset="-78"/>
+                <a:ea typeface="Amiri" pitchFamily="2" charset="-78"/>
                 <a:cs typeface="Amiri" pitchFamily="2" charset="-78"/>
               </a:rPr>
               <a:t>م</a:t>
@@ -22797,6 +22929,7 @@
                   <a:srgbClr val="8A6D1E"/>
                 </a:solidFill>
                 <a:latin typeface="Amiri" pitchFamily="2" charset="-78"/>
+                <a:ea typeface="Amiri" pitchFamily="2" charset="-78"/>
                 <a:cs typeface="Amiri" pitchFamily="2" charset="-78"/>
               </a:rPr>
               <a:t>رِحْلَتُنَا إِلَى مِنْطَقَةِ البُحَيْرَاتِ</a:t>
@@ -23272,6 +23405,7 @@
                   <a:srgbClr val="1B3B6F"/>
                 </a:solidFill>
                 <a:latin typeface="Amiri" pitchFamily="2" charset="-78"/>
+                <a:ea typeface="Amiri" pitchFamily="2" charset="-78"/>
                 <a:cs typeface="Amiri" pitchFamily="2" charset="-78"/>
               </a:rPr>
               <a:t>تَقَعُ المِنْطَقَةُ فِي شَمَالِ …</a:t>
@@ -23348,6 +23482,7 @@
                   <a:srgbClr val="1B3B6F"/>
                 </a:solidFill>
                 <a:latin typeface="Amiri" pitchFamily="2" charset="-78"/>
+                <a:ea typeface="Amiri" pitchFamily="2" charset="-78"/>
                 <a:cs typeface="Amiri" pitchFamily="2" charset="-78"/>
               </a:rPr>
               <a:t>فِيهَا جِبَالٌ عَالِيَةٌ وَ…</a:t>
@@ -23424,6 +23559,7 @@
                   <a:srgbClr val="1B3B6F"/>
                 </a:solidFill>
                 <a:latin typeface="Amiri" pitchFamily="2" charset="-78"/>
+                <a:ea typeface="Amiri" pitchFamily="2" charset="-78"/>
                 <a:cs typeface="Amiri" pitchFamily="2" charset="-78"/>
               </a:rPr>
               <a:t>رَأَيْنَا … بِسَبَبِ … لِذٰلِكَ …</a:t>
@@ -23500,6 +23636,7 @@
                   <a:srgbClr val="1B3B6F"/>
                 </a:solidFill>
                 <a:latin typeface="Amiri" pitchFamily="2" charset="-78"/>
+                <a:ea typeface="Amiri" pitchFamily="2" charset="-78"/>
                 <a:cs typeface="Amiri" pitchFamily="2" charset="-78"/>
               </a:rPr>
               <a:t>فِي الصَّيْفِ سَأَعُودُ …</a:t>
@@ -23671,6 +23808,7 @@
                   <a:srgbClr val="D4AF37"/>
                 </a:solidFill>
                 <a:latin typeface="Amiri" pitchFamily="2" charset="-78"/>
+                <a:ea typeface="Amiri" pitchFamily="2" charset="-78"/>
                 <a:cs typeface="Amiri" pitchFamily="2" charset="-78"/>
               </a:rPr>
               <a:t>م</a:t>
@@ -23991,6 +24129,7 @@
                   <a:srgbClr val="8A6D1E"/>
                 </a:solidFill>
                 <a:latin typeface="Amiri" pitchFamily="2" charset="-78"/>
+                <a:ea typeface="Amiri" pitchFamily="2" charset="-78"/>
                 <a:cs typeface="Amiri" pitchFamily="2" charset="-78"/>
               </a:rPr>
               <a:t>نَصُّ السُّؤَالِ</a:t>
@@ -24271,6 +24410,7 @@
                   <a:srgbClr val="1B3B6F"/>
                 </a:solidFill>
                 <a:latin typeface="Amiri" pitchFamily="2" charset="-78"/>
+                <a:ea typeface="Amiri" pitchFamily="2" charset="-78"/>
                 <a:cs typeface="Amiri" pitchFamily="2" charset="-78"/>
               </a:rPr>
               <a:t>اكْتُبْ رِسَالَةً إِلَى صَدِيقِكَ عَنْ رِحْلَةٍ إِلَى مَكَانٍ طَبِيعِيٍّ (٨٠–٩٠ كَلِمَةً).</a:t>
@@ -24412,6 +24552,7 @@
                   <a:srgbClr val="1B3B6F"/>
                 </a:solidFill>
                 <a:latin typeface="Amiri" pitchFamily="2" charset="-78"/>
+                <a:ea typeface="Amiri" pitchFamily="2" charset="-78"/>
                 <a:cs typeface="Amiri" pitchFamily="2" charset="-78"/>
               </a:rPr>
               <a:t>أَيْنَ ذَهَبْتَ؟ وَأَيْنَ يَقَعُ المَكَانُ؟</a:t>
@@ -24553,6 +24694,7 @@
                   <a:srgbClr val="1B3B6F"/>
                 </a:solidFill>
                 <a:latin typeface="Amiri" pitchFamily="2" charset="-78"/>
+                <a:ea typeface="Amiri" pitchFamily="2" charset="-78"/>
                 <a:cs typeface="Amiri" pitchFamily="2" charset="-78"/>
               </a:rPr>
               <a:t>صِفِ المَكَانَ وَالطَّقْسَ.</a:t>
@@ -24694,6 +24836,7 @@
                   <a:srgbClr val="1B3B6F"/>
                 </a:solidFill>
                 <a:latin typeface="Amiri" pitchFamily="2" charset="-78"/>
+                <a:ea typeface="Amiri" pitchFamily="2" charset="-78"/>
                 <a:cs typeface="Amiri" pitchFamily="2" charset="-78"/>
               </a:rPr>
               <a:t>مَا المُشْكِلَةُ البِيئِيَّةُ الَّتِي رَأَيْتَهَا؟ وَمَاذَا فَعَلْتُمْ؟</a:t>
@@ -24835,6 +24978,7 @@
                   <a:srgbClr val="1B3B6F"/>
                 </a:solidFill>
                 <a:latin typeface="Amiri" pitchFamily="2" charset="-78"/>
+                <a:ea typeface="Amiri" pitchFamily="2" charset="-78"/>
                 <a:cs typeface="Amiri" pitchFamily="2" charset="-78"/>
               </a:rPr>
               <a:t>مَا رَأْيُكَ؟ وَمَا خِطَطُكَ؟ وَاسْأَلْ صَدِيقَكَ سُؤَالًا.</a:t>
@@ -25044,6 +25188,7 @@
                   <a:srgbClr val="D4AF37"/>
                 </a:solidFill>
                 <a:latin typeface="Amiri" pitchFamily="2" charset="-78"/>
+                <a:ea typeface="Amiri" pitchFamily="2" charset="-78"/>
                 <a:cs typeface="Amiri" pitchFamily="2" charset="-78"/>
               </a:rPr>
               <a:t>م</a:t>
@@ -25364,6 +25509,7 @@
                   <a:srgbClr val="8A6D1E"/>
                 </a:solidFill>
                 <a:latin typeface="Amiri" pitchFamily="2" charset="-78"/>
+                <a:ea typeface="Amiri" pitchFamily="2" charset="-78"/>
                 <a:cs typeface="Amiri" pitchFamily="2" charset="-78"/>
               </a:rPr>
               <a:t>قَوَالِبُ الكِتَابَةِ</a:t>
@@ -25644,6 +25790,7 @@
                   <a:srgbClr val="1B3B6F"/>
                 </a:solidFill>
                 <a:latin typeface="Amiri" pitchFamily="2" charset="-78"/>
+                <a:ea typeface="Amiri" pitchFamily="2" charset="-78"/>
                 <a:cs typeface="Amiri" pitchFamily="2" charset="-78"/>
               </a:rPr>
               <a:t>مَرْحَبًا يَا ______ ، كَيْفَ حَالُكَ؟</a:t>
@@ -25850,6 +25997,7 @@
                   <a:srgbClr val="1B3B6F"/>
                 </a:solidFill>
                 <a:latin typeface="Amiri" pitchFamily="2" charset="-78"/>
+                <a:ea typeface="Amiri" pitchFamily="2" charset="-78"/>
                 <a:cs typeface="Amiri" pitchFamily="2" charset="-78"/>
               </a:rPr>
               <a:t>قَضَيْتُ … فِي ______ . تَقَعُ المِنْطَقَةُ فِي ______ .</a:t>
@@ -26056,6 +26204,7 @@
                   <a:srgbClr val="1B3B6F"/>
                 </a:solidFill>
                 <a:latin typeface="Amiri" pitchFamily="2" charset="-78"/>
+                <a:ea typeface="Amiri" pitchFamily="2" charset="-78"/>
                 <a:cs typeface="Amiri" pitchFamily="2" charset="-78"/>
               </a:rPr>
               <a:t>فِيهَا ______ وَ______ . كَانَ الجَوُّ ______ .</a:t>
@@ -26262,6 +26411,7 @@
                   <a:srgbClr val="1B3B6F"/>
                 </a:solidFill>
                 <a:latin typeface="Amiri" pitchFamily="2" charset="-78"/>
+                <a:ea typeface="Amiri" pitchFamily="2" charset="-78"/>
                 <a:cs typeface="Amiri" pitchFamily="2" charset="-78"/>
               </a:rPr>
               <a:t>رَأَيْنَا ______ بِسَبَبِ ______ ، لِذٰلِكَ ______ .</a:t>
@@ -26468,6 +26618,7 @@
                   <a:srgbClr val="1B3B6F"/>
                 </a:solidFill>
                 <a:latin typeface="Amiri" pitchFamily="2" charset="-78"/>
+                <a:ea typeface="Amiri" pitchFamily="2" charset="-78"/>
                 <a:cs typeface="Amiri" pitchFamily="2" charset="-78"/>
               </a:rPr>
               <a:t>أَظُنُّ أَنَّ ______ . فِي الصَّيْفِ سَأَعُودُ ______ .</a:t>
@@ -26674,6 +26825,7 @@
                   <a:srgbClr val="1B3B6F"/>
                 </a:solidFill>
                 <a:latin typeface="Amiri" pitchFamily="2" charset="-78"/>
+                <a:ea typeface="Amiri" pitchFamily="2" charset="-78"/>
                 <a:cs typeface="Amiri" pitchFamily="2" charset="-78"/>
               </a:rPr>
               <a:t>وَأَنْتَ، ______ ؟ إِلَى اللِّقَاءِ.</a:t>
@@ -26913,13 +27065,9 @@
     <a:fontScheme name="Office">
       <a:majorFont>
         <a:latin typeface="Calibri Light" panose="020F0302020204030204"/>
-        <a:ea typeface=""/>
-        <a:cs typeface=""/>
-        <a:font script="Jpan" typeface="游ゴシック Light"/>
-        <a:font script="Hang" typeface="맑은 고딕"/>
-        <a:font script="Hans" typeface="等线 Light"/>
-        <a:font script="Hant" typeface="新細明體"/>
-        <a:font script="Arab" typeface="Times New Roman"/>
+        <a:ea typeface="Amiri" pitchFamily="2" charset="-78"/>
+        <a:cs typeface="Amiri" pitchFamily="2" charset="-78"/>
+        <a:font script="Arab" typeface="Amiri"/>
         <a:font script="Hebr" typeface="Times New Roman"/>
         <a:font script="Thai" typeface="Angsana New"/>
         <a:font script="Ethi" typeface="Nyala"/>
@@ -26965,13 +27113,9 @@
       </a:majorFont>
       <a:minorFont>
         <a:latin typeface="Calibri" panose="020F0502020204030204"/>
-        <a:ea typeface=""/>
-        <a:cs typeface=""/>
-        <a:font script="Jpan" typeface="游ゴシック"/>
-        <a:font script="Hang" typeface="맑은 고딕"/>
-        <a:font script="Hans" typeface="等线"/>
-        <a:font script="Hant" typeface="新細明體"/>
-        <a:font script="Arab" typeface="Arial"/>
+        <a:ea typeface="Amiri" pitchFamily="2" charset="-78"/>
+        <a:cs typeface="Amiri" pitchFamily="2" charset="-78"/>
+        <a:font script="Arab" typeface="Amiri"/>
         <a:font script="Hebr" typeface="Arial"/>
         <a:font script="Thai" typeface="Cordia New"/>
         <a:font script="Ethi" typeface="Nyala"/>

--- a/Final_Revision/Exam_Practice/FR-L03_Writing_Workshop_Places_Environment_and_the_Digital_World.pptx
+++ b/Final_Revision/Exam_Practice/FR-L03_Writing_Workshop_Places_Environment_and_the_Digital_World.pptx
@@ -3848,7 +3848,7 @@
                 <a:solidFill>
                   <a:srgbClr val="FFFFFF"/>
                 </a:solidFill>
-                <a:latin typeface="Calibri" pitchFamily="34" charset="0"/>
+                <a:latin typeface="Amiri" pitchFamily="2" charset="-78"/>
                 <a:ea typeface="Amiri" pitchFamily="2" charset="-78"/>
                 <a:cs typeface="Amiri" pitchFamily="2" charset="-78"/>
               </a:rPr>
@@ -3914,7 +3914,7 @@
                 <a:solidFill>
                   <a:srgbClr val="FFFFFF"/>
                 </a:solidFill>
-                <a:latin typeface="Calibri" pitchFamily="34" charset="0"/>
+                <a:latin typeface="Amiri" pitchFamily="2" charset="-78"/>
                 <a:ea typeface="Amiri" pitchFamily="2" charset="-78"/>
                 <a:cs typeface="Amiri" pitchFamily="2" charset="-78"/>
               </a:rPr>
@@ -3980,7 +3980,7 @@
                 <a:solidFill>
                   <a:srgbClr val="FFFFFF"/>
                 </a:solidFill>
-                <a:latin typeface="Calibri" pitchFamily="34" charset="0"/>
+                <a:latin typeface="Amiri" pitchFamily="2" charset="-78"/>
                 <a:ea typeface="Amiri" pitchFamily="2" charset="-78"/>
                 <a:cs typeface="Amiri" pitchFamily="2" charset="-78"/>
               </a:rPr>
@@ -4046,7 +4046,7 @@
                 <a:solidFill>
                   <a:srgbClr val="FFFFFF"/>
                 </a:solidFill>
-                <a:latin typeface="Calibri" pitchFamily="34" charset="0"/>
+                <a:latin typeface="Amiri" pitchFamily="2" charset="-78"/>
                 <a:ea typeface="Amiri" pitchFamily="2" charset="-78"/>
                 <a:cs typeface="Amiri" pitchFamily="2" charset="-78"/>
               </a:rPr>
@@ -4844,7 +4844,7 @@
                 <a:solidFill>
                   <a:srgbClr val="FFFFFF"/>
                 </a:solidFill>
-                <a:latin typeface="Calibri" pitchFamily="34" charset="0"/>
+                <a:latin typeface="Amiri" pitchFamily="2" charset="-78"/>
                 <a:ea typeface="Amiri" pitchFamily="2" charset="-78"/>
                 <a:cs typeface="Amiri" pitchFamily="2" charset="-78"/>
               </a:rPr>
@@ -4910,7 +4910,7 @@
                 <a:solidFill>
                   <a:srgbClr val="FFFFFF"/>
                 </a:solidFill>
-                <a:latin typeface="Calibri" pitchFamily="34" charset="0"/>
+                <a:latin typeface="Amiri" pitchFamily="2" charset="-78"/>
                 <a:ea typeface="Amiri" pitchFamily="2" charset="-78"/>
                 <a:cs typeface="Amiri" pitchFamily="2" charset="-78"/>
               </a:rPr>
@@ -4976,7 +4976,7 @@
                 <a:solidFill>
                   <a:srgbClr val="FFFFFF"/>
                 </a:solidFill>
-                <a:latin typeface="Calibri" pitchFamily="34" charset="0"/>
+                <a:latin typeface="Amiri" pitchFamily="2" charset="-78"/>
                 <a:ea typeface="Amiri" pitchFamily="2" charset="-78"/>
                 <a:cs typeface="Amiri" pitchFamily="2" charset="-78"/>
               </a:rPr>
@@ -5042,7 +5042,7 @@
                 <a:solidFill>
                   <a:srgbClr val="FFFFFF"/>
                 </a:solidFill>
-                <a:latin typeface="Calibri" pitchFamily="34" charset="0"/>
+                <a:latin typeface="Amiri" pitchFamily="2" charset="-78"/>
                 <a:ea typeface="Amiri" pitchFamily="2" charset="-78"/>
                 <a:cs typeface="Amiri" pitchFamily="2" charset="-78"/>
               </a:rPr>
@@ -8599,7 +8599,7 @@
                 <a:solidFill>
                   <a:srgbClr val="FFFFFF"/>
                 </a:solidFill>
-                <a:latin typeface="Calibri" pitchFamily="34" charset="0"/>
+                <a:latin typeface="Amiri" pitchFamily="2" charset="-78"/>
                 <a:ea typeface="Amiri" pitchFamily="2" charset="-78"/>
                 <a:cs typeface="Amiri" pitchFamily="2" charset="-78"/>
               </a:rPr>
@@ -8665,7 +8665,7 @@
                 <a:solidFill>
                   <a:srgbClr val="FFFFFF"/>
                 </a:solidFill>
-                <a:latin typeface="Calibri" pitchFamily="34" charset="0"/>
+                <a:latin typeface="Amiri" pitchFamily="2" charset="-78"/>
                 <a:ea typeface="Amiri" pitchFamily="2" charset="-78"/>
                 <a:cs typeface="Amiri" pitchFamily="2" charset="-78"/>
               </a:rPr>
@@ -8731,7 +8731,7 @@
                 <a:solidFill>
                   <a:srgbClr val="FFFFFF"/>
                 </a:solidFill>
-                <a:latin typeface="Calibri" pitchFamily="34" charset="0"/>
+                <a:latin typeface="Amiri" pitchFamily="2" charset="-78"/>
                 <a:ea typeface="Amiri" pitchFamily="2" charset="-78"/>
                 <a:cs typeface="Amiri" pitchFamily="2" charset="-78"/>
               </a:rPr>
@@ -8797,7 +8797,7 @@
                 <a:solidFill>
                   <a:srgbClr val="FFFFFF"/>
                 </a:solidFill>
-                <a:latin typeface="Calibri" pitchFamily="34" charset="0"/>
+                <a:latin typeface="Amiri" pitchFamily="2" charset="-78"/>
                 <a:ea typeface="Amiri" pitchFamily="2" charset="-78"/>
                 <a:cs typeface="Amiri" pitchFamily="2" charset="-78"/>
               </a:rPr>
@@ -9584,7 +9584,7 @@
                 <a:solidFill>
                   <a:srgbClr val="FFFFFF"/>
                 </a:solidFill>
-                <a:latin typeface="Calibri" pitchFamily="34" charset="0"/>
+                <a:latin typeface="Amiri" pitchFamily="2" charset="-78"/>
                 <a:ea typeface="Amiri" pitchFamily="2" charset="-78"/>
                 <a:cs typeface="Amiri" pitchFamily="2" charset="-78"/>
               </a:rPr>
@@ -9650,7 +9650,7 @@
                 <a:solidFill>
                   <a:srgbClr val="FFFFFF"/>
                 </a:solidFill>
-                <a:latin typeface="Calibri" pitchFamily="34" charset="0"/>
+                <a:latin typeface="Amiri" pitchFamily="2" charset="-78"/>
                 <a:ea typeface="Amiri" pitchFamily="2" charset="-78"/>
                 <a:cs typeface="Amiri" pitchFamily="2" charset="-78"/>
               </a:rPr>
@@ -9716,7 +9716,7 @@
                 <a:solidFill>
                   <a:srgbClr val="FFFFFF"/>
                 </a:solidFill>
-                <a:latin typeface="Calibri" pitchFamily="34" charset="0"/>
+                <a:latin typeface="Amiri" pitchFamily="2" charset="-78"/>
                 <a:ea typeface="Amiri" pitchFamily="2" charset="-78"/>
                 <a:cs typeface="Amiri" pitchFamily="2" charset="-78"/>
               </a:rPr>
@@ -9782,7 +9782,7 @@
                 <a:solidFill>
                   <a:srgbClr val="FFFFFF"/>
                 </a:solidFill>
-                <a:latin typeface="Calibri" pitchFamily="34" charset="0"/>
+                <a:latin typeface="Amiri" pitchFamily="2" charset="-78"/>
                 <a:ea typeface="Amiri" pitchFamily="2" charset="-78"/>
                 <a:cs typeface="Amiri" pitchFamily="2" charset="-78"/>
               </a:rPr>
@@ -10569,7 +10569,7 @@
                 <a:solidFill>
                   <a:srgbClr val="FFFFFF"/>
                 </a:solidFill>
-                <a:latin typeface="Calibri" pitchFamily="34" charset="0"/>
+                <a:latin typeface="Amiri" pitchFamily="2" charset="-78"/>
                 <a:ea typeface="Amiri" pitchFamily="2" charset="-78"/>
                 <a:cs typeface="Amiri" pitchFamily="2" charset="-78"/>
               </a:rPr>
@@ -10635,7 +10635,7 @@
                 <a:solidFill>
                   <a:srgbClr val="FFFFFF"/>
                 </a:solidFill>
-                <a:latin typeface="Calibri" pitchFamily="34" charset="0"/>
+                <a:latin typeface="Amiri" pitchFamily="2" charset="-78"/>
                 <a:ea typeface="Amiri" pitchFamily="2" charset="-78"/>
                 <a:cs typeface="Amiri" pitchFamily="2" charset="-78"/>
               </a:rPr>
@@ -10701,7 +10701,7 @@
                 <a:solidFill>
                   <a:srgbClr val="FFFFFF"/>
                 </a:solidFill>
-                <a:latin typeface="Calibri" pitchFamily="34" charset="0"/>
+                <a:latin typeface="Amiri" pitchFamily="2" charset="-78"/>
                 <a:ea typeface="Amiri" pitchFamily="2" charset="-78"/>
                 <a:cs typeface="Amiri" pitchFamily="2" charset="-78"/>
               </a:rPr>
@@ -10767,7 +10767,7 @@
                 <a:solidFill>
                   <a:srgbClr val="FFFFFF"/>
                 </a:solidFill>
-                <a:latin typeface="Calibri" pitchFamily="34" charset="0"/>
+                <a:latin typeface="Amiri" pitchFamily="2" charset="-78"/>
                 <a:ea typeface="Amiri" pitchFamily="2" charset="-78"/>
                 <a:cs typeface="Amiri" pitchFamily="2" charset="-78"/>
               </a:rPr>
